--- a/dist/slides/u1-w01-l02.pptx
+++ b/dist/slides/u1-w01-l02.pptx
@@ -2,20 +2,20 @@
 <file path=ppt/presentation.xml><?xml version="1.0" encoding="utf-8"?>
 <p:presentation xmlns:p="http://schemas.openxmlformats.org/presentationml/2006/main">
   <p:sldMasterIdLst>
-    <p:sldMasterId xmlns:r="http://schemas.openxmlformats.org/officeDocument/2006/relationships" id="2147483648" r:id="R628272b3bff5431b"/>
+    <p:sldMasterId xmlns:r="http://schemas.openxmlformats.org/officeDocument/2006/relationships" id="2147483648" r:id="R5dcea82472914875"/>
   </p:sldMasterIdLst>
   <p:notesMasterIdLst>
-    <p:notesMasterId xmlns:r="http://schemas.openxmlformats.org/officeDocument/2006/relationships" r:id="Rde63c8873a4b4df4"/>
+    <p:notesMasterId xmlns:r="http://schemas.openxmlformats.org/officeDocument/2006/relationships" r:id="R047b6274917d40c0"/>
   </p:notesMasterIdLst>
   <p:sldIdLst>
-    <p:sldId xmlns:r="http://schemas.openxmlformats.org/officeDocument/2006/relationships" id="256" r:id="R6efe5d456c294c52"/>
-    <p:sldId xmlns:r="http://schemas.openxmlformats.org/officeDocument/2006/relationships" id="257" r:id="R17099bd36cad4fdd"/>
-    <p:sldId xmlns:r="http://schemas.openxmlformats.org/officeDocument/2006/relationships" id="258" r:id="Rc2bc49c88a3041fc"/>
-    <p:sldId xmlns:r="http://schemas.openxmlformats.org/officeDocument/2006/relationships" id="259" r:id="Rdf8bc8baeea347d3"/>
-    <p:sldId xmlns:r="http://schemas.openxmlformats.org/officeDocument/2006/relationships" id="260" r:id="R455bc3ac45af4f21"/>
-    <p:sldId xmlns:r="http://schemas.openxmlformats.org/officeDocument/2006/relationships" id="261" r:id="Rb25d3302863f49c9"/>
-    <p:sldId xmlns:r="http://schemas.openxmlformats.org/officeDocument/2006/relationships" id="262" r:id="Rb5bbf278d0104ffc"/>
-    <p:sldId xmlns:r="http://schemas.openxmlformats.org/officeDocument/2006/relationships" id="263" r:id="R073edca7733d46bd"/>
+    <p:sldId xmlns:r="http://schemas.openxmlformats.org/officeDocument/2006/relationships" id="256" r:id="Rdd1204a7d9d24ed4"/>
+    <p:sldId xmlns:r="http://schemas.openxmlformats.org/officeDocument/2006/relationships" id="257" r:id="R5c666058bb5c4e00"/>
+    <p:sldId xmlns:r="http://schemas.openxmlformats.org/officeDocument/2006/relationships" id="258" r:id="R0c6bf7e3366640c9"/>
+    <p:sldId xmlns:r="http://schemas.openxmlformats.org/officeDocument/2006/relationships" id="259" r:id="Rb5b9aef55ea340cd"/>
+    <p:sldId xmlns:r="http://schemas.openxmlformats.org/officeDocument/2006/relationships" id="260" r:id="Ra091fa03f1cb4638"/>
+    <p:sldId xmlns:r="http://schemas.openxmlformats.org/officeDocument/2006/relationships" id="261" r:id="R9b9e4b8f373b4387"/>
+    <p:sldId xmlns:r="http://schemas.openxmlformats.org/officeDocument/2006/relationships" id="262" r:id="Rbabf1bfbc0a5458f"/>
+    <p:sldId xmlns:r="http://schemas.openxmlformats.org/officeDocument/2006/relationships" id="263" r:id="Rebfef256413e45e5"/>
   </p:sldIdLst>
   <p:sldSz cx="12192000" cy="6858000"/>
   <p:notesSz cx="6858000" cy="9144000"/>
@@ -454,6 +454,11 @@
           </a:p>
           <a:p xmlns:a="http://schemas.openxmlformats.org/drawingml/2006/main">
             <a:r>
+              <a:t>Instructional strategy: Learning intention.</a:t>
+            </a:r>
+          </a:p>
+          <a:p xmlns:a="http://schemas.openxmlformats.org/drawingml/2006/main">
+            <a:r>
               <a:t>Use the school-approved environment. Do not ask learners to install software or change school settings during the lesson.</a:t>
             </a:r>
           </a:p>
@@ -554,7 +559,12 @@
           </a:p>
           <a:p xmlns:a="http://schemas.openxmlformats.org/drawingml/2006/main">
             <a:r>
-              <a:t>Expected: quantity; quantity multiplied by 3; $18. Use quick responses to decide whether a short input/process/output reminder is needed.</a:t>
+              <a:t>Instructional strategy: Retrieval practice.</a:t>
+            </a:r>
+          </a:p>
+          <a:p xmlns:a="http://schemas.openxmlformats.org/drawingml/2006/main">
+            <a:r>
+              <a:t>Use one minute of individual retrieval, then compare and correct. Expected quantity, quantity × 3, $18. Ask everyone to show the calculation. If confusion remains between input and processing, briefly return to the three-row badge example before opening the editor.</a:t>
             </a:r>
           </a:p>
           <a:p xmlns:a="http://schemas.openxmlformats.org/drawingml/2006/main">
@@ -650,6 +660,11 @@
           <a:p xmlns:a="http://schemas.openxmlformats.org/drawingml/2006/main">
             <a:r>
               <a:t>Suggested 6 minutes.</a:t>
+            </a:r>
+          </a:p>
+          <a:p xmlns:a="http://schemas.openxmlformats.org/drawingml/2006/main">
+            <a:r>
+              <a:t>Instructional strategy: Success criteria.</a:t>
             </a:r>
           </a:p>
           <a:p xmlns:a="http://schemas.openxmlformats.org/drawingml/2006/main">
@@ -754,7 +769,12 @@
           </a:p>
           <a:p xmlns:a="http://schemas.openxmlformats.org/drawingml/2006/main">
             <a:r>
-              <a:t>Demonstrate using the actual school environment. An IDE combines tools for writing and running code. Avoid a filename such as random.py that could shadow a standard Python module. Saving and running are separate actions.</a:t>
+              <a:t>Instructional strategy: Demonstration with guided rehearsal.</a:t>
+            </a:r>
+          </a:p>
+          <a:p xmlns:a="http://schemas.openxmlformats.org/drawingml/2006/main">
+            <a:r>
+              <a:t>Demonstrate in the school-approved editor for three minutes, then pause for learners to repeat each step. Ask partners to point to controls on their own screens, without taking over. Check everyone has a saved .py file before continuing. Save stores changes and Run executes them. Provide a prepared folder or printed instructions for setup support. Avoid filenames that shadow modules, such as random.py.</a:t>
             </a:r>
           </a:p>
           <a:p xmlns:a="http://schemas.openxmlformats.org/drawingml/2006/main">
@@ -854,7 +874,12 @@
           </a:p>
           <a:p xmlns:a="http://schemas.openxmlformats.org/drawingml/2006/main">
             <a:r>
-              <a:t>Read top to bottom. input reads text, int converts suitable whole-number text, assignment binds the calculated value to total, and print displays it. Uppercase BADGE_PRICE communicates intent to keep the price fixed; Python does not enforce that convention.</a:t>
+              <a:t>Instructional strategy: Code reading and teacher think-aloud.</a:t>
+            </a:r>
+          </a:p>
+          <a:p xmlns:a="http://schemas.openxmlformats.org/drawingml/2006/main">
+            <a:r>
+              <a:t>Read the code top to bottom and connect each line to the paper plan. Ask learners to point to the line that reads input before you explain it. input returns text and int converts suitable whole-number text. Pause before the total line and elicit a prediction for quantity 4. print displays the result. Uppercase BADGE_PRICE signals an intended fixed value, but Python does not enforce it. Model the reasoning rather than only typing.</a:t>
             </a:r>
           </a:p>
           <a:p xmlns:a="http://schemas.openxmlformats.org/drawingml/2006/main">
@@ -954,7 +979,12 @@
           </a:p>
           <a:p xmlns:a="http://schemas.openxmlformats.org/drawingml/2006/main">
             <a:r>
-              <a:t>Expected: Total: $12. Help learners distinguish the source editor from the program’s input/output area. Ask them to rerun with 1 and 0, predicting first: $3 and $0. Do not use invalid inputs for this introductory task.</a:t>
+              <a:t>Instructional strategy: Predict, run, investigate.</a:t>
+            </a:r>
+          </a:p>
+          <a:p xmlns:a="http://schemas.openxmlformats.org/drawingml/2006/main">
+            <a:r>
+              <a:t>Use individual predictions before learners work in pairs. Driver runs the file and navigator checks the prediction and explains a line, then swap for the next quantity. Expected $12, $3, $0. If a result differs, inspect the saved file and input before changing code. Each learner retains a prediction/result record. Use suitable inputs only.</a:t>
             </a:r>
           </a:p>
           <a:p xmlns:a="http://schemas.openxmlformats.org/drawingml/2006/main">
@@ -1054,7 +1084,12 @@
           </a:p>
           <a:p xmlns:a="http://schemas.openxmlformats.org/drawingml/2006/main">
             <a:r>
-              <a:t>Expected total $20. If output is unchanged, check saving and which file is running before editing more code. Return the price to 3 after checking.</a:t>
+              <a:t>Instructional strategy: Controlled variation and explanation.</a:t>
+            </a:r>
+          </a:p>
+          <a:p xmlns:a="http://schemas.openxmlformats.org/drawingml/2006/main">
+            <a:r>
+              <a:t>Expected $20. Ask all learners to write why quantity still needs input while the fixed price changes. If the output stays $12, check saving and which file is running. Support: highlight the price line. Stretch: predict a new price and quantity before testing. Keep the original file structure.</a:t>
             </a:r>
           </a:p>
           <a:p xmlns:a="http://schemas.openxmlformats.org/drawingml/2006/main">
@@ -1154,7 +1189,12 @@
           </a:p>
           <a:p xmlns:a="http://schemas.openxmlformats.org/drawingml/2006/main">
             <a:r>
-              <a:t>Expected Total: $6. Save stores changes; Run executes the program. Record environment/setup difficulties for support rather than treating every failure as a conceptual programming error.</a:t>
+              <a:t>Instructional strategy: Independent performance check.</a:t>
+            </a:r>
+          </a:p>
+          <a:p xmlns:a="http://schemas.openxmlformats.org/drawingml/2006/main">
+            <a:r>
+              <a:t>Each learner saves and runs their own file for quantity 2 at price 3, predicting Total: $6 first. Ask for a spoken or written explanation of Save versus Run. Record setup difficulties separately from conceptual errors. Start the next lesson with a short demonstration for learners who need environment support.</a:t>
             </a:r>
           </a:p>
           <a:p xmlns:a="http://schemas.openxmlformats.org/drawingml/2006/main">
@@ -1226,7 +1266,7 @@
           <p:cNvPr id="3" name="Title">
             <a:extLst xmlns:a="http://schemas.openxmlformats.org/drawingml/2006/main">
               <a:ext uri="{FF2B5EF4-FFF2-40B4-BE49-F238E27FC236}">
-                <a16:creationId xmlns:a16="http://schemas.microsoft.com/office/drawing/2014/main" id="{DDB61CE5-F6F3-4614-A876-FE60608C6E66}"/>
+                <a16:creationId xmlns:a16="http://schemas.microsoft.com/office/drawing/2014/main" id="{54CE801B-E59E-4B6C-BBF0-43614C7AFD6C}"/>
               </a:ext>
             </a:extLst>
           </p:cNvPr>
@@ -1383,7 +1423,7 @@
           <p:cNvPr id="2" name="Subtitle">
             <a:extLst xmlns:a="http://schemas.openxmlformats.org/drawingml/2006/main">
               <a:ext uri="{FF2B5EF4-FFF2-40B4-BE49-F238E27FC236}">
-                <a16:creationId xmlns:a16="http://schemas.microsoft.com/office/drawing/2014/main" id="{DD5F67DC-DFB2-4E79-B252-048E849CBE36}"/>
+                <a16:creationId xmlns:a16="http://schemas.microsoft.com/office/drawing/2014/main" id="{321A6002-EF09-4838-A8F7-AC232869A2F5}"/>
               </a:ext>
             </a:extLst>
           </p:cNvPr>
@@ -1557,7 +1597,7 @@
           <p:cNvPr id="2" name="Section title">
             <a:extLst xmlns:a="http://schemas.openxmlformats.org/drawingml/2006/main">
               <a:ext uri="{FF2B5EF4-FFF2-40B4-BE49-F238E27FC236}">
-                <a16:creationId xmlns:a16="http://schemas.microsoft.com/office/drawing/2014/main" id="{A98CA42F-1F13-4EB9-8791-2445151FA1A4}"/>
+                <a16:creationId xmlns:a16="http://schemas.microsoft.com/office/drawing/2014/main" id="{2B72ADE3-F01F-497F-995A-D6BDD85587F8}"/>
               </a:ext>
             </a:extLst>
           </p:cNvPr>
@@ -1731,7 +1771,7 @@
           <p:cNvPr id="3" name="Title">
             <a:extLst xmlns:a="http://schemas.openxmlformats.org/drawingml/2006/main">
               <a:ext uri="{FF2B5EF4-FFF2-40B4-BE49-F238E27FC236}">
-                <a16:creationId xmlns:a16="http://schemas.microsoft.com/office/drawing/2014/main" id="{3D3CC509-49A4-4023-BED8-FC15728D4A64}"/>
+                <a16:creationId xmlns:a16="http://schemas.microsoft.com/office/drawing/2014/main" id="{B8DC25AD-71DD-41D9-95EB-A9F9FEAF108F}"/>
               </a:ext>
             </a:extLst>
           </p:cNvPr>
@@ -1888,7 +1928,7 @@
           <p:cNvPr id="2" name="Body">
             <a:extLst xmlns:a="http://schemas.openxmlformats.org/drawingml/2006/main">
               <a:ext uri="{FF2B5EF4-FFF2-40B4-BE49-F238E27FC236}">
-                <a16:creationId xmlns:a16="http://schemas.microsoft.com/office/drawing/2014/main" id="{5B529A4B-5A70-44E2-8766-652E5E1975A7}"/>
+                <a16:creationId xmlns:a16="http://schemas.microsoft.com/office/drawing/2014/main" id="{E50A08EF-758E-4A36-AC16-4C9AA7CA45B0}"/>
               </a:ext>
             </a:extLst>
           </p:cNvPr>
@@ -2062,7 +2102,7 @@
           <p:cNvPr id="4" name="Title">
             <a:extLst xmlns:a="http://schemas.openxmlformats.org/drawingml/2006/main">
               <a:ext uri="{FF2B5EF4-FFF2-40B4-BE49-F238E27FC236}">
-                <a16:creationId xmlns:a16="http://schemas.microsoft.com/office/drawing/2014/main" id="{E334C635-63A5-4B7E-8390-F0ADB1C55D2E}"/>
+                <a16:creationId xmlns:a16="http://schemas.microsoft.com/office/drawing/2014/main" id="{08FD2285-DB54-4B00-8016-875F2DEFFF8F}"/>
               </a:ext>
             </a:extLst>
           </p:cNvPr>
@@ -2219,7 +2259,7 @@
           <p:cNvPr id="2" name="Left column">
             <a:extLst xmlns:a="http://schemas.openxmlformats.org/drawingml/2006/main">
               <a:ext uri="{FF2B5EF4-FFF2-40B4-BE49-F238E27FC236}">
-                <a16:creationId xmlns:a16="http://schemas.microsoft.com/office/drawing/2014/main" id="{785EA8A0-F0EE-4AA8-A666-D7B8326F08F4}"/>
+                <a16:creationId xmlns:a16="http://schemas.microsoft.com/office/drawing/2014/main" id="{F85B7D81-D7C8-4435-9478-F05043442F5B}"/>
               </a:ext>
             </a:extLst>
           </p:cNvPr>
@@ -2376,7 +2416,7 @@
           <p:cNvPr id="3" name="Right column">
             <a:extLst xmlns:a="http://schemas.openxmlformats.org/drawingml/2006/main">
               <a:ext uri="{FF2B5EF4-FFF2-40B4-BE49-F238E27FC236}">
-                <a16:creationId xmlns:a16="http://schemas.microsoft.com/office/drawing/2014/main" id="{059C58B5-656D-4106-8016-80634D59D1B3}"/>
+                <a16:creationId xmlns:a16="http://schemas.microsoft.com/office/drawing/2014/main" id="{D1C10833-7034-4192-9694-1BB4A86BF54D}"/>
               </a:ext>
             </a:extLst>
           </p:cNvPr>
@@ -2550,7 +2590,7 @@
           <p:cNvPr id="3" name="Title">
             <a:extLst xmlns:a="http://schemas.openxmlformats.org/drawingml/2006/main">
               <a:ext uri="{FF2B5EF4-FFF2-40B4-BE49-F238E27FC236}">
-                <a16:creationId xmlns:a16="http://schemas.microsoft.com/office/drawing/2014/main" id="{B229A369-70D6-4FAA-9C67-B39B4E71E1C6}"/>
+                <a16:creationId xmlns:a16="http://schemas.microsoft.com/office/drawing/2014/main" id="{FE44D6B5-C0C6-44DA-A639-5A8997A3F270}"/>
               </a:ext>
             </a:extLst>
           </p:cNvPr>
@@ -2707,7 +2747,7 @@
           <p:cNvPr id="2" name="Left column">
             <a:extLst xmlns:a="http://schemas.openxmlformats.org/drawingml/2006/main">
               <a:ext uri="{FF2B5EF4-FFF2-40B4-BE49-F238E27FC236}">
-                <a16:creationId xmlns:a16="http://schemas.microsoft.com/office/drawing/2014/main" id="{5B39110D-D9B4-4A4F-918D-5153D3A98E14}"/>
+                <a16:creationId xmlns:a16="http://schemas.microsoft.com/office/drawing/2014/main" id="{7BEA00DA-785C-4C9D-A3CB-665CCE1E3BDE}"/>
               </a:ext>
             </a:extLst>
           </p:cNvPr>
@@ -2902,12 +2942,12 @@
   </p:cSld>
   <p:clrMap bg1="lt1" tx1="dk1" bg2="lt2" tx2="dk2" accent1="accent1" accent2="accent2" accent3="accent3" accent4="accent4" accent5="accent5" accent6="accent6" hlink="hlink" folHlink="folHlink"/>
   <p:sldLayoutIdLst>
-    <p:sldLayoutId xmlns:r="http://schemas.openxmlformats.org/officeDocument/2006/relationships" id="2147483649" r:id="Rb24a57198a564687"/>
-    <p:sldLayoutId xmlns:r="http://schemas.openxmlformats.org/officeDocument/2006/relationships" id="2147483650" r:id="R4a5c223b63d34afb"/>
-    <p:sldLayoutId xmlns:r="http://schemas.openxmlformats.org/officeDocument/2006/relationships" id="2147483651" r:id="Rfb2dbc402062430c"/>
-    <p:sldLayoutId xmlns:r="http://schemas.openxmlformats.org/officeDocument/2006/relationships" id="2147483652" r:id="R9bfffed6ac8540a2"/>
-    <p:sldLayoutId xmlns:r="http://schemas.openxmlformats.org/officeDocument/2006/relationships" id="2147483653" r:id="R699fb531c6ac4937"/>
-    <p:sldLayoutId xmlns:r="http://schemas.openxmlformats.org/officeDocument/2006/relationships" id="2147483654" r:id="R1895c6d348bf41fc"/>
+    <p:sldLayoutId xmlns:r="http://schemas.openxmlformats.org/officeDocument/2006/relationships" id="2147483649" r:id="R94ca157ccb4d443c"/>
+    <p:sldLayoutId xmlns:r="http://schemas.openxmlformats.org/officeDocument/2006/relationships" id="2147483650" r:id="R9a4201cd304f4595"/>
+    <p:sldLayoutId xmlns:r="http://schemas.openxmlformats.org/officeDocument/2006/relationships" id="2147483651" r:id="Rd07c887eb0714828"/>
+    <p:sldLayoutId xmlns:r="http://schemas.openxmlformats.org/officeDocument/2006/relationships" id="2147483652" r:id="R5dbd8dd6b6964751"/>
+    <p:sldLayoutId xmlns:r="http://schemas.openxmlformats.org/officeDocument/2006/relationships" id="2147483653" r:id="Rf4c99f7a39914a74"/>
+    <p:sldLayoutId xmlns:r="http://schemas.openxmlformats.org/officeDocument/2006/relationships" id="2147483654" r:id="Rebb9a6375aa54d05"/>
   </p:sldLayoutIdLst>
   <p:txStyles>
     <p:titleStyle>
@@ -3458,7 +3498,7 @@
           <ns0:cNvPr id="5" name="Run your first Python script">
             <ns1:extLst>
               <ns1:ext uri="{FF2B5EF4-FFF2-40B4-BE49-F238E27FC236}">
-                <ns2:creationId id="{B0DEFB56-E5D1-4E81-B61C-C3D24AE5804D}"/>
+                <ns2:creationId id="{3142245A-6265-4C6C-AAD1-9FCBBB1FA252}"/>
               </ns1:ext>
             </ns1:extLst>
           </ns0:cNvPr>
@@ -3526,7 +3566,7 @@
           <ns0:cNvPr id="2" name="Unit 1 · Week 1 · Lesson 2">
             <ns1:extLst>
               <ns1:ext uri="{FF2B5EF4-FFF2-40B4-BE49-F238E27FC236}">
-                <ns2:creationId id="{C7EB2A1B-01E3-487A-AA53-7F7E1A81354F}"/>
+                <ns2:creationId id="{D7CEA24B-2A1F-4711-A8EE-8AB3CB2536B1}"/>
               </ns1:ext>
             </ns1:extLst>
           </ns0:cNvPr>
@@ -3592,7 +3632,7 @@
           <ns0:cNvPr id="3" name="Turn the badge algorithm into a saved program.">
             <ns1:extLst>
               <ns1:ext uri="{FF2B5EF4-FFF2-40B4-BE49-F238E27FC236}">
-                <ns2:creationId id="{D6D75BB2-1F80-4798-BE4B-29E5D1BED986}"/>
+                <ns2:creationId id="{D9B5435E-D116-4C8F-BE31-F7AB6186AB36}"/>
               </ns1:ext>
             </ns1:extLst>
           </ns0:cNvPr>
@@ -3658,7 +3698,7 @@
           <ns0:cNvPr id="4" name="U1-W01-L02  ·  1/8  ·  Content CC BY 4.0 / code MIT">
             <ns1:extLst>
               <ns1:ext uri="{FF2B5EF4-FFF2-40B4-BE49-F238E27FC236}">
-                <ns2:creationId id="{B383680B-664E-4848-8B78-369A106AABBC}"/>
+                <ns2:creationId id="{B2CFC37A-86DA-42A1-A681-447699F524CA}"/>
               </ns1:ext>
             </ns1:extLst>
           </ns0:cNvPr>
@@ -3722,7 +3762,7 @@
     </ns0:spTree>
     <ns0:extLst>
       <ns0:ext uri="{BB962C8B-B14F-4D97-AF65-F5344CB8AC3E}">
-        <ns3:creationId val="2038917462"/>
+        <ns3:creationId val="590657240"/>
       </ns0:ext>
     </ns0:extLst>
   </ns0:cSld>
@@ -3750,10 +3790,10 @@
       </ns0:grpSpPr>
       <ns0:sp>
         <ns0:nvSpPr>
-          <ns0:cNvPr id="6" name="Retrieve the badge plan">
+          <ns0:cNvPr id="7" name="Retrieve the badge plan">
             <ns1:extLst>
               <ns1:ext uri="{FF2B5EF4-FFF2-40B4-BE49-F238E27FC236}">
-                <ns2:creationId id="{8712B983-5BC7-44C8-A34C-2AFBE90E3C51}"/>
+                <ns2:creationId id="{3EEFFF38-D577-498E-ACD8-5ED9D7BA78E1}"/>
               </ns1:ext>
             </ns1:extLst>
           </ns0:cNvPr>
@@ -3818,10 +3858,10 @@
       </ns0:sp>
       <ns0:sp>
         <ns0:nvSpPr>
-          <ns0:cNvPr id="2" name="What is the input?">
+          <ns0:cNvPr id="2" name="Close your notes for one minute.">
             <ns1:extLst>
               <ns1:ext uri="{FF2B5EF4-FFF2-40B4-BE49-F238E27FC236}">
-                <ns2:creationId id="{C376A929-055F-4671-B90F-E09CF0E0FB64}"/>
+                <ns2:creationId id="{4154CFFD-1562-4641-B25F-C86ABAA84E50}"/>
               </ns1:ext>
             </ns1:extLst>
           </ns0:cNvPr>
@@ -3877,17 +3917,17 @@
                 <ns1:ea typeface="Arial"/>
                 <ns1:cs typeface="Arial"/>
               </ns1:rPr>
-              <ns1:t>What is the input?</ns1:t>
+              <ns1:t>Close your notes for one minute.</ns1:t>
             </ns1:r>
           </ns1:p>
         </ns0:txBody>
       </ns0:sp>
       <ns0:sp>
         <ns0:nvSpPr>
-          <ns0:cNvPr id="3" name="Which instruction calculates the total?">
+          <ns0:cNvPr id="3" name="Name the input and calculation step.">
             <ns1:extLst>
               <ns1:ext uri="{FF2B5EF4-FFF2-40B4-BE49-F238E27FC236}">
-                <ns2:creationId id="{1DB81C75-326C-4838-9688-43993EDB11F7}"/>
+                <ns2:creationId id="{0A9B3428-AAD0-4EC6-A870-64575638AF49}"/>
               </ns1:ext>
             </ns1:extLst>
           </ns0:cNvPr>
@@ -3943,17 +3983,17 @@
                 <ns1:ea typeface="Arial"/>
                 <ns1:cs typeface="Arial"/>
               </ns1:rPr>
-              <ns1:t>Which instruction calculates the total?</ns1:t>
+              <ns1:t>Name the input and calculation step.</ns1:t>
             </ns1:r>
           </ns1:p>
         </ns0:txBody>
       </ns0:sp>
       <ns0:sp>
         <ns0:nvSpPr>
-          <ns0:cNvPr id="4" name="What should six badges cost?">
+          <ns0:cNvPr id="4" name="Predict the cost of six badges.">
             <ns1:extLst>
               <ns1:ext uri="{FF2B5EF4-FFF2-40B4-BE49-F238E27FC236}">
-                <ns2:creationId id="{09E8518A-20C4-42B4-81A0-0EA16A5AE2BD}"/>
+                <ns2:creationId id="{3EA2BCE1-EB5D-4FA8-919A-8568A266D5AB}"/>
               </ns1:ext>
             </ns1:extLst>
           </ns0:cNvPr>
@@ -4009,17 +4049,83 @@
                 <ns1:ea typeface="Arial"/>
                 <ns1:cs typeface="Arial"/>
               </ns1:rPr>
-              <ns1:t>What should six badges cost?</ns1:t>
+              <ns1:t>Predict the cost of six badges.</ns1:t>
             </ns1:r>
           </ns1:p>
         </ns0:txBody>
       </ns0:sp>
       <ns0:sp>
         <ns0:nvSpPr>
-          <ns0:cNvPr id="5" name="U1-W01-L02  ·  2/8  ·  Content CC BY 4.0 / code MIT">
+          <ns0:cNvPr id="5" name="Compare with your notes and correct one detail.">
             <ns1:extLst>
               <ns1:ext uri="{FF2B5EF4-FFF2-40B4-BE49-F238E27FC236}">
-                <ns2:creationId id="{0FDE7C4A-125A-4874-ADCE-E072B7135A41}"/>
+                <ns2:creationId id="{B5A11EB8-E735-49A5-A61A-53927C5B5206}"/>
+              </ns1:ext>
+            </ns1:extLst>
+          </ns0:cNvPr>
+          <ns0:cNvSpPr>
+            <ns1:spLocks noGrp="1"/>
+          </ns0:cNvSpPr>
+          <ns0:nvPr/>
+        </ns0:nvSpPr>
+        <ns0:spPr>
+          <ns1:xfrm>
+            <ns1:off x="685800" y="4305300"/>
+            <ns1:ext cx="10820400" cy="714375"/>
+          </ns1:xfrm>
+          <ns1:prstGeom prst="rect">
+            <ns1:avLst/>
+          </ns1:prstGeom>
+          <ns1:noFill/>
+          <ns1:ln w="0">
+            <ns1:noFill/>
+          </ns1:ln>
+        </ns0:spPr>
+        <ns0:txBody>
+          <ns1:bodyPr/>
+          <ns1:lstStyle>
+            <ns1:defPPr>
+              <ns1:defRPr sz="2400" b="0">
+                <ns1:solidFill>
+                  <ns1:srgbClr val="18322D"/>
+                </ns1:solidFill>
+                <ns1:latin typeface="Arial"/>
+                <ns1:ea typeface="Arial"/>
+                <ns1:cs typeface="Arial"/>
+              </ns1:defRPr>
+            </ns1:defPPr>
+          </ns1:lstStyle>
+          <ns1:p>
+            <ns1:pPr>
+              <ns1:defRPr sz="2400" b="0">
+                <ns1:solidFill>
+                  <ns1:srgbClr val="18322D"/>
+                </ns1:solidFill>
+                <ns1:latin typeface="Arial"/>
+                <ns1:ea typeface="Arial"/>
+                <ns1:cs typeface="Arial"/>
+              </ns1:defRPr>
+            </ns1:pPr>
+            <ns1:r>
+              <ns1:rPr sz="2400" b="0">
+                <ns1:solidFill>
+                  <ns1:srgbClr val="18322D"/>
+                </ns1:solidFill>
+                <ns1:latin typeface="Arial"/>
+                <ns1:ea typeface="Arial"/>
+                <ns1:cs typeface="Arial"/>
+              </ns1:rPr>
+              <ns1:t>Compare with your notes and correct one detail.</ns1:t>
+            </ns1:r>
+          </ns1:p>
+        </ns0:txBody>
+      </ns0:sp>
+      <ns0:sp>
+        <ns0:nvSpPr>
+          <ns0:cNvPr id="6" name="U1-W01-L02  ·  2/8  ·  Content CC BY 4.0 / code MIT">
+            <ns1:extLst>
+              <ns1:ext uri="{FF2B5EF4-FFF2-40B4-BE49-F238E27FC236}">
+                <ns2:creationId id="{9538B256-0017-43B6-AD22-3C955908F83C}"/>
               </ns1:ext>
             </ns1:extLst>
           </ns0:cNvPr>
@@ -4083,7 +4189,7 @@
     </ns0:spTree>
     <ns0:extLst>
       <ns0:ext uri="{BB962C8B-B14F-4D97-AF65-F5344CB8AC3E}">
-        <ns3:creationId val="1581978603"/>
+        <ns3:creationId val="2128487674"/>
       </ns0:ext>
     </ns0:extLst>
   </ns0:cSld>
@@ -4114,7 +4220,7 @@
           <ns0:cNvPr id="6" name="Today’s goal">
             <ns1:extLst>
               <ns1:ext uri="{FF2B5EF4-FFF2-40B4-BE49-F238E27FC236}">
-                <ns2:creationId id="{53D8DD57-F193-424E-957C-988EB2CA4D00}"/>
+                <ns2:creationId id="{BFD9BC52-9847-4678-A5AD-CA28A2150660}"/>
               </ns1:ext>
             </ns1:extLst>
           </ns0:cNvPr>
@@ -4182,7 +4288,7 @@
           <ns0:cNvPr id="2" name="Save and run a Python script.">
             <ns1:extLst>
               <ns1:ext uri="{FF2B5EF4-FFF2-40B4-BE49-F238E27FC236}">
-                <ns2:creationId id="{7E58DFC7-4174-4533-81DE-9E13B955F34F}"/>
+                <ns2:creationId id="{439E01DD-AE11-4DC9-A7D6-9D08E6D39944}"/>
               </ns1:ext>
             </ns1:extLst>
           </ns0:cNvPr>
@@ -4248,7 +4354,7 @@
           <ns0:cNvPr id="3" name="Enter suitable data when prompted.">
             <ns1:extLst>
               <ns1:ext uri="{FF2B5EF4-FFF2-40B4-BE49-F238E27FC236}">
-                <ns2:creationId id="{45A4A899-F32A-4CAE-A1EF-93642ED7F003}"/>
+                <ns2:creationId id="{6B9B03E8-A43F-480B-8907-8F4ECC25D714}"/>
               </ns1:ext>
             </ns1:extLst>
           </ns0:cNvPr>
@@ -4314,7 +4420,7 @@
           <ns0:cNvPr id="4" name="Compare actual output with a prediction.">
             <ns1:extLst>
               <ns1:ext uri="{FF2B5EF4-FFF2-40B4-BE49-F238E27FC236}">
-                <ns2:creationId id="{F291CDA9-6DBF-47C5-B646-156218D1746E}"/>
+                <ns2:creationId id="{ED359B2B-955F-49A3-BDA1-35B730FB4FF4}"/>
               </ns1:ext>
             </ns1:extLst>
           </ns0:cNvPr>
@@ -4380,7 +4486,7 @@
           <ns0:cNvPr id="5" name="U1-W01-L02  ·  3/8  ·  Content CC BY 4.0 / code MIT">
             <ns1:extLst>
               <ns1:ext uri="{FF2B5EF4-FFF2-40B4-BE49-F238E27FC236}">
-                <ns2:creationId id="{B9099856-BF53-433D-A241-DA168B2676B2}"/>
+                <ns2:creationId id="{E925903D-6202-4684-983D-81A4CCA905C1}"/>
               </ns1:ext>
             </ns1:extLst>
           </ns0:cNvPr>
@@ -4444,7 +4550,7 @@
     </ns0:spTree>
     <ns0:extLst>
       <ns0:ext uri="{BB962C8B-B14F-4D97-AF65-F5344CB8AC3E}">
-        <ns3:creationId val="464511352"/>
+        <ns3:creationId val="1041180871"/>
       </ns0:ext>
     </ns0:extLst>
   </ns0:cSld>
@@ -4472,10 +4578,10 @@
       </ns0:grpSpPr>
       <ns0:sp>
         <ns0:nvSpPr>
-          <ns0:cNvPr id="7" name="Prepare the workspace">
+          <ns0:cNvPr id="7" name="From demonstration to your own file">
             <ns1:extLst>
               <ns1:ext uri="{FF2B5EF4-FFF2-40B4-BE49-F238E27FC236}">
-                <ns2:creationId id="{FB991D64-4849-447E-8A82-EAEADCA021F9}"/>
+                <ns2:creationId id="{CF8D29B1-1162-4383-A002-6E10D1EFB048}"/>
               </ns1:ext>
             </ns1:extLst>
           </ns0:cNvPr>
@@ -4533,17 +4639,17 @@
                 <ns1:ea typeface="Arial"/>
                 <ns1:cs typeface="Arial"/>
               </ns1:rPr>
-              <ns1:t>Prepare the workspace</ns1:t>
+              <ns1:t>From demonstration to your own file</ns1:t>
             </ns1:r>
           </ns1:p>
         </ns0:txBody>
       </ns0:sp>
       <ns0:sp>
         <ns0:nvSpPr>
-          <ns0:cNvPr id="2" name="1. Open the approved Python editor or IDE.">
+          <ns0:cNvPr id="2" name="Watch the teacher save badge_cost.py.">
             <ns1:extLst>
               <ns1:ext uri="{FF2B5EF4-FFF2-40B4-BE49-F238E27FC236}">
-                <ns2:creationId id="{10A34498-4B88-41D0-9606-A5F62E79B57D}"/>
+                <ns2:creationId id="{9AFFF33B-C0D6-4E05-90E0-5D2F8EC253BD}"/>
               </ns1:ext>
             </ns1:extLst>
           </ns0:cNvPr>
@@ -4599,17 +4705,17 @@
                 <ns1:ea typeface="Arial"/>
                 <ns1:cs typeface="Arial"/>
               </ns1:rPr>
-              <ns1:t>1. Open the approved Python editor or IDE.</ns1:t>
+              <ns1:t>Watch the teacher save badge_cost.py.</ns1:t>
             </ns1:r>
           </ns1:p>
         </ns0:txBody>
       </ns0:sp>
       <ns0:sp>
         <ns0:nvSpPr>
-          <ns0:cNvPr id="3" name="2. Create a folder for this week’s work.">
+          <ns0:cNvPr id="3" name="Point out the editor and output area.">
             <ns1:extLst>
               <ns1:ext uri="{FF2B5EF4-FFF2-40B4-BE49-F238E27FC236}">
-                <ns2:creationId id="{517C02C7-D407-48FA-8061-AAB3DD73554F}"/>
+                <ns2:creationId id="{33C80AEF-1438-4860-A47D-108A93E026BB}"/>
               </ns1:ext>
             </ns1:extLst>
           </ns0:cNvPr>
@@ -4665,17 +4771,17 @@
                 <ns1:ea typeface="Arial"/>
                 <ns1:cs typeface="Arial"/>
               </ns1:rPr>
-              <ns1:t>2. Create a folder for this week’s work.</ns1:t>
+              <ns1:t>Point out the editor and output area.</ns1:t>
             </ns1:r>
           </ns1:p>
         </ns0:txBody>
       </ns0:sp>
       <ns0:sp>
         <ns0:nvSpPr>
-          <ns0:cNvPr id="4" name="3. Save a new file as badge_cost.py.">
+          <ns0:cNvPr id="4" name="Create your own file in this week’s folder.">
             <ns1:extLst>
               <ns1:ext uri="{FF2B5EF4-FFF2-40B4-BE49-F238E27FC236}">
-                <ns2:creationId id="{2382D0B5-33B5-4819-930D-AB1AF45D391C}"/>
+                <ns2:creationId id="{C4ADDF15-4918-43BF-A994-E228785B36B5}"/>
               </ns1:ext>
             </ns1:extLst>
           </ns0:cNvPr>
@@ -4731,17 +4837,17 @@
                 <ns1:ea typeface="Arial"/>
                 <ns1:cs typeface="Arial"/>
               </ns1:rPr>
-              <ns1:t>3. Save a new file as badge_cost.py.</ns1:t>
+              <ns1:t>Create your own file in this week’s folder.</ns1:t>
             </ns1:r>
           </ns1:p>
         </ns0:txBody>
       </ns0:sp>
       <ns0:sp>
         <ns0:nvSpPr>
-          <ns0:cNvPr id="5" name="4. Locate the editor, Run command and output area.">
+          <ns0:cNvPr id="5" name="Show your partner where Save and Run are.">
             <ns1:extLst>
               <ns1:ext uri="{FF2B5EF4-FFF2-40B4-BE49-F238E27FC236}">
-                <ns2:creationId id="{6A393C27-F156-4404-96DD-B6219C51DC5F}"/>
+                <ns2:creationId id="{EF30909D-767E-450B-8322-26D195E262A3}"/>
               </ns1:ext>
             </ns1:extLst>
           </ns0:cNvPr>
@@ -4797,7 +4903,7 @@
                 <ns1:ea typeface="Arial"/>
                 <ns1:cs typeface="Arial"/>
               </ns1:rPr>
-              <ns1:t>4. Locate the editor, Run command and output area.</ns1:t>
+              <ns1:t>Show your partner where Save and Run are.</ns1:t>
             </ns1:r>
           </ns1:p>
         </ns0:txBody>
@@ -4807,7 +4913,7 @@
           <ns0:cNvPr id="6" name="U1-W01-L02  ·  4/8  ·  Content CC BY 4.0 / code MIT">
             <ns1:extLst>
               <ns1:ext uri="{FF2B5EF4-FFF2-40B4-BE49-F238E27FC236}">
-                <ns2:creationId id="{532436D1-837B-43FB-9A1C-A8E0E9C32418}"/>
+                <ns2:creationId id="{8EDA8071-A162-4DEA-BBED-6413E362796C}"/>
               </ns1:ext>
             </ns1:extLst>
           </ns0:cNvPr>
@@ -4871,7 +4977,7 @@
     </ns0:spTree>
     <ns0:extLst>
       <ns0:ext uri="{BB962C8B-B14F-4D97-AF65-F5344CB8AC3E}">
-        <ns3:creationId val="1373654311"/>
+        <ns3:creationId val="530150846"/>
       </ns0:ext>
     </ns0:extLst>
   </ns0:cSld>
@@ -4902,7 +5008,7 @@
           <ns0:cNvPr id="4" name="The badge script">
             <ns1:extLst>
               <ns1:ext uri="{FF2B5EF4-FFF2-40B4-BE49-F238E27FC236}">
-                <ns2:creationId id="{7E605AB9-0F98-4A39-A057-A161D574ED8F}"/>
+                <ns2:creationId id="{46FE49D9-A24F-41B5-B9AF-E54A22309C39}"/>
               </ns1:ext>
             </ns1:extLst>
           </ns0:cNvPr>
@@ -4970,7 +5076,7 @@
           <ns0:cNvPr id="2" name="BADGE_PRICE = 3&#10;quantity = int(input(&quot;Number of badges: &quot;))&#10;">
             <ns1:extLst>
               <ns1:ext uri="{FF2B5EF4-FFF2-40B4-BE49-F238E27FC236}">
-                <ns2:creationId id="{884522DE-623D-4E4E-B4AF-ED045B6B2A66}"/>
+                <ns2:creationId id="{65326089-704B-4279-B558-41FFA6698C88}"/>
               </ns1:ext>
             </ns1:extLst>
           </ns0:cNvPr>
@@ -5105,7 +5211,7 @@
           <ns0:cNvPr id="3" name="U1-W01-L02  ·  5/8  ·  Content CC BY 4.0 / code MIT">
             <ns1:extLst>
               <ns1:ext uri="{FF2B5EF4-FFF2-40B4-BE49-F238E27FC236}">
-                <ns2:creationId id="{D884F9D7-6622-4D54-B23F-9C4D7A00D20A}"/>
+                <ns2:creationId id="{EC5AD567-82C8-4DCC-93ED-ECEAFF36A171}"/>
               </ns1:ext>
             </ns1:extLst>
           </ns0:cNvPr>
@@ -5169,7 +5275,7 @@
     </ns0:spTree>
     <ns0:extLst>
       <ns0:ext uri="{BB962C8B-B14F-4D97-AF65-F5344CB8AC3E}">
-        <ns3:creationId val="2052975967"/>
+        <ns3:creationId val="1715757966"/>
       </ns0:ext>
     </ns0:extLst>
   </ns0:cSld>
@@ -5197,10 +5303,10 @@
       </ns0:grpSpPr>
       <ns0:sp>
         <ns0:nvSpPr>
-          <ns0:cNvPr id="7" name="Predict, save, run">
+          <ns0:cNvPr id="7" name="A prediction before each run">
             <ns1:extLst>
               <ns1:ext uri="{FF2B5EF4-FFF2-40B4-BE49-F238E27FC236}">
-                <ns2:creationId id="{5F52771B-FB0D-4947-BF26-CC513973D60B}"/>
+                <ns2:creationId id="{7C069BCC-C297-4BB9-AC2D-2F2396FE832F}"/>
               </ns1:ext>
             </ns1:extLst>
           </ns0:cNvPr>
@@ -5258,17 +5364,17 @@
                 <ns1:ea typeface="Arial"/>
                 <ns1:cs typeface="Arial"/>
               </ns1:rPr>
-              <ns1:t>Predict, save, run</ns1:t>
+              <ns1:t>A prediction before each run</ns1:t>
             </ns1:r>
           </ns1:p>
         </ns0:txBody>
       </ns0:sp>
       <ns0:sp>
         <ns0:nvSpPr>
-          <ns0:cNvPr id="2" name="Predict the result for four badges.">
+          <ns0:cNvPr id="2" name="Write your prediction for four badges.">
             <ns1:extLst>
               <ns1:ext uri="{FF2B5EF4-FFF2-40B4-BE49-F238E27FC236}">
-                <ns2:creationId id="{CC4A2410-A433-44D3-BF1D-652E7C796028}"/>
+                <ns2:creationId id="{A364F275-9911-4DA5-9831-11D8C60C6DC7}"/>
               </ns1:ext>
             </ns1:extLst>
           </ns0:cNvPr>
@@ -5324,17 +5430,17 @@
                 <ns1:ea typeface="Arial"/>
                 <ns1:cs typeface="Arial"/>
               </ns1:rPr>
-              <ns1:t>Predict the result for four badges.</ns1:t>
+              <ns1:t>Write your prediction for four badges.</ns1:t>
             </ns1:r>
           </ns1:p>
         </ns0:txBody>
       </ns0:sp>
       <ns0:sp>
         <ns0:nvSpPr>
-          <ns0:cNvPr id="3" name="Save the file, then use Run.">
+          <ns0:cNvPr id="3" name="Run the saved script and enter 4.">
             <ns1:extLst>
               <ns1:ext uri="{FF2B5EF4-FFF2-40B4-BE49-F238E27FC236}">
-                <ns2:creationId id="{8CE094F7-D6CC-41FC-9114-775C766020F5}"/>
+                <ns2:creationId id="{44B9315B-695B-4CEB-9FBF-D47CD0B68B05}"/>
               </ns1:ext>
             </ns1:extLst>
           </ns0:cNvPr>
@@ -5390,17 +5496,17 @@
                 <ns1:ea typeface="Arial"/>
                 <ns1:cs typeface="Arial"/>
               </ns1:rPr>
-              <ns1:t>Save the file, then use Run.</ns1:t>
+              <ns1:t>Run the saved script and enter 4.</ns1:t>
             </ns1:r>
           </ns1:p>
         </ns0:txBody>
       </ns0:sp>
       <ns0:sp>
         <ns0:nvSpPr>
-          <ns0:cNvPr id="4" name="Enter 4 when the program asks.">
+          <ns0:cNvPr id="4" name="Compare expected and actual output with a partner.">
             <ns1:extLst>
               <ns1:ext uri="{FF2B5EF4-FFF2-40B4-BE49-F238E27FC236}">
-                <ns2:creationId id="{FBF13FFC-3A08-4CA9-A5AD-BDFBBECC1F8D}"/>
+                <ns2:creationId id="{C9BC91F2-A912-4A7B-8207-AD9A08833446}"/>
               </ns1:ext>
             </ns1:extLst>
           </ns0:cNvPr>
@@ -5456,17 +5562,17 @@
                 <ns1:ea typeface="Arial"/>
                 <ns1:cs typeface="Arial"/>
               </ns1:rPr>
-              <ns1:t>Enter 4 when the program asks.</ns1:t>
+              <ns1:t>Compare expected and actual output with a partner.</ns1:t>
             </ns1:r>
           </ns1:p>
         </ns0:txBody>
       </ns0:sp>
       <ns0:sp>
         <ns0:nvSpPr>
-          <ns0:cNvPr id="5" name="Record the expected and actual output.">
+          <ns0:cNvPr id="5" name="Repeat for 1 and 0, predicting each time.">
             <ns1:extLst>
               <ns1:ext uri="{FF2B5EF4-FFF2-40B4-BE49-F238E27FC236}">
-                <ns2:creationId id="{26B1E2CB-B622-46DB-82DF-8BDF2AAA98A2}"/>
+                <ns2:creationId id="{71EFE57E-F3D9-444C-94B7-49E7F4C1BD99}"/>
               </ns1:ext>
             </ns1:extLst>
           </ns0:cNvPr>
@@ -5522,7 +5628,7 @@
                 <ns1:ea typeface="Arial"/>
                 <ns1:cs typeface="Arial"/>
               </ns1:rPr>
-              <ns1:t>Record the expected and actual output.</ns1:t>
+              <ns1:t>Repeat for 1 and 0, predicting each time.</ns1:t>
             </ns1:r>
           </ns1:p>
         </ns0:txBody>
@@ -5532,7 +5638,7 @@
           <ns0:cNvPr id="6" name="U1-W01-L02  ·  6/8  ·  Content CC BY 4.0 / code MIT">
             <ns1:extLst>
               <ns1:ext uri="{FF2B5EF4-FFF2-40B4-BE49-F238E27FC236}">
-                <ns2:creationId id="{94D368EA-E710-4311-8E0F-F5F510131158}"/>
+                <ns2:creationId id="{8F322A25-CB03-441D-A847-7086A5EF2946}"/>
               </ns1:ext>
             </ns1:extLst>
           </ns0:cNvPr>
@@ -5596,7 +5702,7 @@
     </ns0:spTree>
     <ns0:extLst>
       <ns0:ext uri="{BB962C8B-B14F-4D97-AF65-F5344CB8AC3E}">
-        <ns3:creationId val="272479094"/>
+        <ns3:creationId val="193568996"/>
       </ns0:ext>
     </ns0:extLst>
   </ns0:cSld>
@@ -5624,10 +5730,10 @@
       </ns0:grpSpPr>
       <ns0:sp>
         <ns0:nvSpPr>
-          <ns0:cNvPr id="7" name="Make one controlled change">
+          <ns0:cNvPr id="7" name="One change, a new prediction">
             <ns1:extLst>
               <ns1:ext uri="{FF2B5EF4-FFF2-40B4-BE49-F238E27FC236}">
-                <ns2:creationId id="{4B426A33-359C-421A-AC6B-0DB203149579}"/>
+                <ns2:creationId id="{92B6EE01-4C78-4945-A2DF-84F63BB41A37}"/>
               </ns1:ext>
             </ns1:extLst>
           </ns0:cNvPr>
@@ -5685,7 +5791,7 @@
                 <ns1:ea typeface="Arial"/>
                 <ns1:cs typeface="Arial"/>
               </ns1:rPr>
-              <ns1:t>Make one controlled change</ns1:t>
+              <ns1:t>One change, a new prediction</ns1:t>
             </ns1:r>
           </ns1:p>
         </ns0:txBody>
@@ -5695,7 +5801,7 @@
           <ns0:cNvPr id="2" name="Change BADGE_PRICE from 3 to 5.">
             <ns1:extLst>
               <ns1:ext uri="{FF2B5EF4-FFF2-40B4-BE49-F238E27FC236}">
-                <ns2:creationId id="{F871F269-C37C-49FC-903E-1EA017BB45F7}"/>
+                <ns2:creationId id="{7EF09265-92E2-4A22-8775-103EF2C81BD5}"/>
               </ns1:ext>
             </ns1:extLst>
           </ns0:cNvPr>
@@ -5758,10 +5864,10 @@
       </ns0:sp>
       <ns0:sp>
         <ns0:nvSpPr>
-          <ns0:cNvPr id="3" name="Predict the total for four badges.">
+          <ns0:cNvPr id="3" name="Predict four badges before running.">
             <ns1:extLst>
               <ns1:ext uri="{FF2B5EF4-FFF2-40B4-BE49-F238E27FC236}">
-                <ns2:creationId id="{B413D93B-BDBA-4363-9C3A-91D1D940A56B}"/>
+                <ns2:creationId id="{A0FE3BB3-F25F-482B-8295-D0A37249319B}"/>
               </ns1:ext>
             </ns1:extLst>
           </ns0:cNvPr>
@@ -5817,17 +5923,17 @@
                 <ns1:ea typeface="Arial"/>
                 <ns1:cs typeface="Arial"/>
               </ns1:rPr>
-              <ns1:t>Predict the total for four badges.</ns1:t>
+              <ns1:t>Predict four badges before running.</ns1:t>
             </ns1:r>
           </ns1:p>
         </ns0:txBody>
       </ns0:sp>
       <ns0:sp>
         <ns0:nvSpPr>
-          <ns0:cNvPr id="4" name="Save and rerun the program.">
+          <ns0:cNvPr id="4" name="Explain why the input line stays the same.">
             <ns1:extLst>
               <ns1:ext uri="{FF2B5EF4-FFF2-40B4-BE49-F238E27FC236}">
-                <ns2:creationId id="{8B9F56C8-0B06-4852-B30A-9F28E9CCC736}"/>
+                <ns2:creationId id="{5CCD2E03-AA3E-412F-AD08-347FE2D8E3A8}"/>
               </ns1:ext>
             </ns1:extLst>
           </ns0:cNvPr>
@@ -5883,17 +5989,17 @@
                 <ns1:ea typeface="Arial"/>
                 <ns1:cs typeface="Arial"/>
               </ns1:rPr>
-              <ns1:t>Save and rerun the program.</ns1:t>
+              <ns1:t>Explain why the input line stays the same.</ns1:t>
             </ns1:r>
           </ns1:p>
         </ns0:txBody>
       </ns0:sp>
       <ns0:sp>
         <ns0:nvSpPr>
-          <ns0:cNvPr id="5" name="Explain which line changed and why.">
+          <ns0:cNvPr id="5" name="Return the price to 3 after checking.">
             <ns1:extLst>
               <ns1:ext uri="{FF2B5EF4-FFF2-40B4-BE49-F238E27FC236}">
-                <ns2:creationId id="{FA9E812D-6462-427D-A9C6-96A212B4C7E5}"/>
+                <ns2:creationId id="{9FEC40C4-3BB7-4C57-AE82-65A711B11285}"/>
               </ns1:ext>
             </ns1:extLst>
           </ns0:cNvPr>
@@ -5949,7 +6055,7 @@
                 <ns1:ea typeface="Arial"/>
                 <ns1:cs typeface="Arial"/>
               </ns1:rPr>
-              <ns1:t>Explain which line changed and why.</ns1:t>
+              <ns1:t>Return the price to 3 after checking.</ns1:t>
             </ns1:r>
           </ns1:p>
         </ns0:txBody>
@@ -5959,7 +6065,7 @@
           <ns0:cNvPr id="6" name="U1-W01-L02  ·  7/8  ·  Content CC BY 4.0 / code MIT">
             <ns1:extLst>
               <ns1:ext uri="{FF2B5EF4-FFF2-40B4-BE49-F238E27FC236}">
-                <ns2:creationId id="{08E0DCD3-3D2A-4E27-8F3F-D4EED04B4CF7}"/>
+                <ns2:creationId id="{ACFCFACD-91B8-4D1A-A168-4A3DDC7C905E}"/>
               </ns1:ext>
             </ns1:extLst>
           </ns0:cNvPr>
@@ -6023,7 +6129,7 @@
     </ns0:spTree>
     <ns0:extLst>
       <ns0:ext uri="{BB962C8B-B14F-4D97-AF65-F5344CB8AC3E}">
-        <ns3:creationId val="1363375989"/>
+        <ns3:creationId val="1256326733"/>
       </ns0:ext>
     </ns0:extLst>
   </ns0:cSld>
@@ -6054,7 +6160,7 @@
           <ns0:cNvPr id="7" name="Exit check: run independently">
             <ns1:extLst>
               <ns1:ext uri="{FF2B5EF4-FFF2-40B4-BE49-F238E27FC236}">
-                <ns2:creationId id="{97490ECF-564D-4C4D-A854-8A5AB866FF94}"/>
+                <ns2:creationId id="{31F554D9-C268-4B8A-8A63-67595B2BF595}"/>
               </ns1:ext>
             </ns1:extLst>
           </ns0:cNvPr>
@@ -6122,7 +6228,7 @@
           <ns0:cNvPr id="2" name="Show your saved Python file.">
             <ns1:extLst>
               <ns1:ext uri="{FF2B5EF4-FFF2-40B4-BE49-F238E27FC236}">
-                <ns2:creationId id="{9E2436C3-A684-4EE2-9C4D-038C14499427}"/>
+                <ns2:creationId id="{D99AE7EA-DA75-4437-AC2A-75C95C0E598E}"/>
               </ns1:ext>
             </ns1:extLst>
           </ns0:cNvPr>
@@ -6188,7 +6294,7 @@
           <ns0:cNvPr id="3" name="Run it for two badges at $3 each.">
             <ns1:extLst>
               <ns1:ext uri="{FF2B5EF4-FFF2-40B4-BE49-F238E27FC236}">
-                <ns2:creationId id="{21AB07EA-48A9-48DE-A690-579583A71C4F}"/>
+                <ns2:creationId id="{9C9912B4-F745-496D-913A-F8834EFDEE08}"/>
               </ns1:ext>
             </ns1:extLst>
           </ns0:cNvPr>
@@ -6254,7 +6360,7 @@
           <ns0:cNvPr id="4" name="State the expected output before running.">
             <ns1:extLst>
               <ns1:ext uri="{FF2B5EF4-FFF2-40B4-BE49-F238E27FC236}">
-                <ns2:creationId id="{DF9556A5-3BAE-4D26-B11C-4FD5028505A8}"/>
+                <ns2:creationId id="{D8F44014-8ACF-410A-87C6-4EA400E31606}"/>
               </ns1:ext>
             </ns1:extLst>
           </ns0:cNvPr>
@@ -6320,7 +6426,7 @@
           <ns0:cNvPr id="5" name="Explain the difference between Save and Run.">
             <ns1:extLst>
               <ns1:ext uri="{FF2B5EF4-FFF2-40B4-BE49-F238E27FC236}">
-                <ns2:creationId id="{28E7EFBB-D9DF-483D-97C0-A6136C2D141A}"/>
+                <ns2:creationId id="{2E36128C-0712-416A-9530-2CE35C4422C0}"/>
               </ns1:ext>
             </ns1:extLst>
           </ns0:cNvPr>
@@ -6386,7 +6492,7 @@
           <ns0:cNvPr id="6" name="U1-W01-L02  ·  8/8  ·  Content CC BY 4.0 / code MIT">
             <ns1:extLst>
               <ns1:ext uri="{FF2B5EF4-FFF2-40B4-BE49-F238E27FC236}">
-                <ns2:creationId id="{39F570B7-5E8C-4A44-A74C-54211FF303CE}"/>
+                <ns2:creationId id="{86A9D70A-108B-4B6F-AD09-2874E75B9186}"/>
               </ns1:ext>
             </ns1:extLst>
           </ns0:cNvPr>
@@ -6450,7 +6556,7 @@
     </ns0:spTree>
     <ns0:extLst>
       <ns0:ext uri="{BB962C8B-B14F-4D97-AF65-F5344CB8AC3E}">
-        <ns3:creationId val="1259290321"/>
+        <ns3:creationId val="1427878460"/>
       </ns0:ext>
     </ns0:extLst>
   </ns0:cSld>
